--- a/tpl/PPT模板.pptx
+++ b/tpl/PPT模板.pptx
@@ -3,20 +3,20 @@
 <p:presentation xmlns:a="http://schemas.openxmlformats.org/drawingml/2006/main" xmlns:r="http://schemas.openxmlformats.org/officeDocument/2006/relationships" xmlns:p="http://schemas.openxmlformats.org/presentationml/2006/main" autoCompressPictures="0">
   <p:sldMasterIdLst>
     <p:sldMasterId id="2147483648" r:id="rId1"/>
-    <p:sldMasterId id="2147483663" r:id="rId3"/>
+    <p:sldMasterId id="2147483663" r:id="rId2"/>
   </p:sldMasterIdLst>
   <p:notesMasterIdLst>
-    <p:notesMasterId r:id="rId9"/>
+    <p:notesMasterId r:id="rId8"/>
   </p:notesMasterIdLst>
   <p:handoutMasterIdLst>
-    <p:handoutMasterId r:id="rId10"/>
+    <p:handoutMasterId r:id="rId9"/>
   </p:handoutMasterIdLst>
   <p:sldIdLst>
-    <p:sldId id="257" r:id="rId4"/>
-    <p:sldId id="3958" r:id="rId5"/>
-    <p:sldId id="3959" r:id="rId6"/>
-    <p:sldId id="3960" r:id="rId7"/>
-    <p:sldId id="3946" r:id="rId8"/>
+    <p:sldId id="257" r:id="rId3"/>
+    <p:sldId id="3958" r:id="rId4"/>
+    <p:sldId id="3959" r:id="rId5"/>
+    <p:sldId id="3960" r:id="rId6"/>
+    <p:sldId id="3946" r:id="rId7"/>
   </p:sldIdLst>
   <p:sldSz cx="12192000" cy="6858000"/>
   <p:notesSz cx="6858000" cy="9144000"/>
@@ -115,6 +115,14 @@
       </a:defRPr>
     </a:lvl9pPr>
   </p:defaultTextStyle>
+  <p:extLst>
+    <p:ext uri="{EFAFB233-063F-42B5-8137-9DF3F51BA10A}">
+      <p15:sldGuideLst xmlns:p15="http://schemas.microsoft.com/office/powerpoint/2012/main"/>
+    </p:ext>
+    <p:ext uri="{2D200454-40CA-4A62-9FC3-DE9A4176ACB9}">
+      <p15:notesGuideLst xmlns:p15="http://schemas.microsoft.com/office/powerpoint/2012/main"/>
+    </p:ext>
+  </p:extLst>
 </p:presentation>
 </file>
 
@@ -200,6 +208,7 @@
           <a:p>
             <a:fld id="{113348CC-58E9-9140-8494-3F4BA61213F7}" type="datetimeFigureOut">
               <a:rPr kumimoji="1" lang="zh-CN" altLang="en-US" smtClean="0"/>
+              <a:t>2026/3/24</a:t>
             </a:fld>
             <a:endParaRPr kumimoji="1" lang="zh-CN" altLang="en-US"/>
           </a:p>
@@ -265,12 +274,18 @@
           <a:p>
             <a:fld id="{5960ACB5-120B-A849-ACB6-7E327AE9452F}" type="slidenum">
               <a:rPr kumimoji="1" lang="zh-CN" altLang="en-US" smtClean="0"/>
+              <a:t>‹#›</a:t>
             </a:fld>
             <a:endParaRPr kumimoji="1" lang="zh-CN" altLang="en-US"/>
           </a:p>
         </p:txBody>
       </p:sp>
     </p:spTree>
+    <p:extLst>
+      <p:ext uri="{BB962C8B-B14F-4D97-AF65-F5344CB8AC3E}">
+        <p14:creationId xmlns:p14="http://schemas.microsoft.com/office/powerpoint/2010/main" val="1"/>
+      </p:ext>
+    </p:extLst>
   </p:cSld>
   <p:clrMap bg1="lt1" tx1="dk1" bg2="lt2" tx2="dk2" accent1="accent1" accent2="accent2" accent3="accent3" accent4="accent4" accent5="accent5" accent6="accent6" hlink="hlink" folHlink="folHlink"/>
 </p:handoutMaster>
@@ -358,6 +373,7 @@
           <a:p>
             <a:fld id="{CDC999D7-7F99-3746-A50A-4B7C9FF226AD}" type="datetimeFigureOut">
               <a:rPr kumimoji="1" lang="zh-CN" altLang="en-US" smtClean="0"/>
+              <a:t>2026/3/24</a:t>
             </a:fld>
             <a:endParaRPr kumimoji="1" lang="zh-CN" altLang="en-US"/>
           </a:p>
@@ -424,7 +440,6 @@
               <a:rPr kumimoji="1" lang="zh-CN" altLang="en-US"/>
               <a:t>单击此处编辑母版文本样式</a:t>
             </a:r>
-            <a:endParaRPr kumimoji="1" lang="zh-CN" altLang="en-US"/>
           </a:p>
           <a:p>
             <a:pPr lvl="1"/>
@@ -432,7 +447,6 @@
               <a:rPr kumimoji="1" lang="zh-CN" altLang="en-US"/>
               <a:t>二级</a:t>
             </a:r>
-            <a:endParaRPr kumimoji="1" lang="zh-CN" altLang="en-US"/>
           </a:p>
           <a:p>
             <a:pPr lvl="2"/>
@@ -440,7 +454,6 @@
               <a:rPr kumimoji="1" lang="zh-CN" altLang="en-US"/>
               <a:t>三级</a:t>
             </a:r>
-            <a:endParaRPr kumimoji="1" lang="zh-CN" altLang="en-US"/>
           </a:p>
           <a:p>
             <a:pPr lvl="3"/>
@@ -448,7 +461,6 @@
               <a:rPr kumimoji="1" lang="zh-CN" altLang="en-US"/>
               <a:t>四级</a:t>
             </a:r>
-            <a:endParaRPr kumimoji="1" lang="zh-CN" altLang="en-US"/>
           </a:p>
           <a:p>
             <a:pPr lvl="4"/>
@@ -456,7 +468,6 @@
               <a:rPr kumimoji="1" lang="zh-CN" altLang="en-US"/>
               <a:t>五级</a:t>
             </a:r>
-            <a:endParaRPr kumimoji="1" lang="zh-CN" altLang="en-US"/>
           </a:p>
         </p:txBody>
       </p:sp>
@@ -520,6 +531,7 @@
           <a:p>
             <a:fld id="{4B2CF82D-95E2-784D-9EEF-51030EC893A3}" type="slidenum">
               <a:rPr kumimoji="1" lang="zh-CN" altLang="en-US" smtClean="0"/>
+              <a:t>‹#›</a:t>
             </a:fld>
             <a:endParaRPr kumimoji="1" lang="zh-CN" altLang="en-US"/>
           </a:p>
@@ -688,6 +700,7 @@
           <a:p>
             <a:fld id="{FE0BE2EF-1EFC-9B46-889F-4515A4DBBA70}" type="slidenum">
               <a:rPr kumimoji="1" lang="zh-CN" altLang="en-US" smtClean="0"/>
+              <a:t>5</a:t>
             </a:fld>
             <a:endParaRPr kumimoji="1" lang="zh-CN" altLang="en-US"/>
           </a:p>
@@ -733,6 +746,9 @@
             <a:off x="1524000" y="1122363"/>
             <a:ext cx="9144000" cy="2387600"/>
           </a:xfrm>
+          <a:prstGeom prst="rect">
+            <a:avLst/>
+          </a:prstGeom>
         </p:spPr>
         <p:txBody>
           <a:bodyPr anchor="b"/>
@@ -746,7 +762,6 @@
               <a:rPr kumimoji="1" lang="zh-CN" altLang="en-US"/>
               <a:t>单击此处编辑母版标题样式</a:t>
             </a:r>
-            <a:endParaRPr kumimoji="1" lang="zh-CN" altLang="en-US"/>
           </a:p>
         </p:txBody>
       </p:sp>
@@ -765,6 +780,9 @@
             <a:off x="1524000" y="3602038"/>
             <a:ext cx="9144000" cy="1655762"/>
           </a:xfrm>
+          <a:prstGeom prst="rect">
+            <a:avLst/>
+          </a:prstGeom>
         </p:spPr>
         <p:txBody>
           <a:bodyPr/>
@@ -811,7 +829,6 @@
               <a:rPr kumimoji="1" lang="zh-CN" altLang="en-US"/>
               <a:t>单击此处编辑母版副标题样式</a:t>
             </a:r>
-            <a:endParaRPr kumimoji="1" lang="zh-CN" altLang="en-US"/>
           </a:p>
         </p:txBody>
       </p:sp>
@@ -832,6 +849,7 @@
           <a:p>
             <a:fld id="{BFB87016-819A-5341-A389-7551C78F7E31}" type="datetimeFigureOut">
               <a:rPr kumimoji="1" lang="zh-CN" altLang="en-US" smtClean="0"/>
+              <a:t>2026/3/24</a:t>
             </a:fld>
             <a:endParaRPr kumimoji="1" lang="zh-CN" altLang="en-US"/>
           </a:p>
@@ -873,6 +891,7 @@
           <a:p>
             <a:fld id="{ABBC389F-5C18-E04C-BAC7-584A3B16DFF8}" type="slidenum">
               <a:rPr kumimoji="1" lang="zh-CN" altLang="en-US" smtClean="0"/>
+              <a:t>‹#›</a:t>
             </a:fld>
             <a:endParaRPr kumimoji="1" lang="zh-CN" altLang="en-US"/>
           </a:p>
@@ -913,7 +932,15 @@
             <p:ph type="title"/>
           </p:nvPr>
         </p:nvSpPr>
-        <p:spPr/>
+        <p:spPr>
+          <a:xfrm>
+            <a:off x="838200" y="365125"/>
+            <a:ext cx="10515600" cy="1325563"/>
+          </a:xfrm>
+          <a:prstGeom prst="rect">
+            <a:avLst/>
+          </a:prstGeom>
+        </p:spPr>
         <p:txBody>
           <a:bodyPr/>
           <a:lstStyle/>
@@ -922,7 +949,6 @@
               <a:rPr kumimoji="1" lang="zh-CN" altLang="en-US"/>
               <a:t>单击此处编辑母版标题样式</a:t>
             </a:r>
-            <a:endParaRPr kumimoji="1" lang="zh-CN" altLang="en-US"/>
           </a:p>
         </p:txBody>
       </p:sp>
@@ -936,7 +962,15 @@
             <p:ph type="body" orient="vert" idx="1"/>
           </p:nvPr>
         </p:nvSpPr>
-        <p:spPr/>
+        <p:spPr>
+          <a:xfrm>
+            <a:off x="838200" y="1825625"/>
+            <a:ext cx="10515600" cy="4351338"/>
+          </a:xfrm>
+          <a:prstGeom prst="rect">
+            <a:avLst/>
+          </a:prstGeom>
+        </p:spPr>
         <p:txBody>
           <a:bodyPr vert="eaVert"/>
           <a:lstStyle/>
@@ -946,7 +980,6 @@
               <a:rPr kumimoji="1" lang="zh-CN" altLang="en-US"/>
               <a:t>单击此处编辑母版文本样式</a:t>
             </a:r>
-            <a:endParaRPr kumimoji="1" lang="zh-CN" altLang="en-US"/>
           </a:p>
           <a:p>
             <a:pPr lvl="1"/>
@@ -954,7 +987,6 @@
               <a:rPr kumimoji="1" lang="zh-CN" altLang="en-US"/>
               <a:t>二级</a:t>
             </a:r>
-            <a:endParaRPr kumimoji="1" lang="zh-CN" altLang="en-US"/>
           </a:p>
           <a:p>
             <a:pPr lvl="2"/>
@@ -962,7 +994,6 @@
               <a:rPr kumimoji="1" lang="zh-CN" altLang="en-US"/>
               <a:t>三级</a:t>
             </a:r>
-            <a:endParaRPr kumimoji="1" lang="zh-CN" altLang="en-US"/>
           </a:p>
           <a:p>
             <a:pPr lvl="3"/>
@@ -970,7 +1001,6 @@
               <a:rPr kumimoji="1" lang="zh-CN" altLang="en-US"/>
               <a:t>四级</a:t>
             </a:r>
-            <a:endParaRPr kumimoji="1" lang="zh-CN" altLang="en-US"/>
           </a:p>
           <a:p>
             <a:pPr lvl="4"/>
@@ -978,7 +1008,6 @@
               <a:rPr kumimoji="1" lang="zh-CN" altLang="en-US"/>
               <a:t>五级</a:t>
             </a:r>
-            <a:endParaRPr kumimoji="1" lang="zh-CN" altLang="en-US"/>
           </a:p>
         </p:txBody>
       </p:sp>
@@ -999,6 +1028,7 @@
           <a:p>
             <a:fld id="{BFB87016-819A-5341-A389-7551C78F7E31}" type="datetimeFigureOut">
               <a:rPr kumimoji="1" lang="zh-CN" altLang="en-US" smtClean="0"/>
+              <a:t>2026/3/24</a:t>
             </a:fld>
             <a:endParaRPr kumimoji="1" lang="zh-CN" altLang="en-US"/>
           </a:p>
@@ -1040,6 +1070,7 @@
           <a:p>
             <a:fld id="{ABBC389F-5C18-E04C-BAC7-584A3B16DFF8}" type="slidenum">
               <a:rPr kumimoji="1" lang="zh-CN" altLang="en-US" smtClean="0"/>
+              <a:t>‹#›</a:t>
             </a:fld>
             <a:endParaRPr kumimoji="1" lang="zh-CN" altLang="en-US"/>
           </a:p>
@@ -1085,6 +1116,9 @@
             <a:off x="8724900" y="365125"/>
             <a:ext cx="2628900" cy="5811838"/>
           </a:xfrm>
+          <a:prstGeom prst="rect">
+            <a:avLst/>
+          </a:prstGeom>
         </p:spPr>
         <p:txBody>
           <a:bodyPr vert="eaVert"/>
@@ -1094,7 +1128,6 @@
               <a:rPr kumimoji="1" lang="zh-CN" altLang="en-US"/>
               <a:t>单击此处编辑母版标题样式</a:t>
             </a:r>
-            <a:endParaRPr kumimoji="1" lang="zh-CN" altLang="en-US"/>
           </a:p>
         </p:txBody>
       </p:sp>
@@ -1113,6 +1146,9 @@
             <a:off x="838200" y="365125"/>
             <a:ext cx="7734300" cy="5811838"/>
           </a:xfrm>
+          <a:prstGeom prst="rect">
+            <a:avLst/>
+          </a:prstGeom>
         </p:spPr>
         <p:txBody>
           <a:bodyPr vert="eaVert"/>
@@ -1123,7 +1159,6 @@
               <a:rPr kumimoji="1" lang="zh-CN" altLang="en-US"/>
               <a:t>单击此处编辑母版文本样式</a:t>
             </a:r>
-            <a:endParaRPr kumimoji="1" lang="zh-CN" altLang="en-US"/>
           </a:p>
           <a:p>
             <a:pPr lvl="1"/>
@@ -1131,7 +1166,6 @@
               <a:rPr kumimoji="1" lang="zh-CN" altLang="en-US"/>
               <a:t>二级</a:t>
             </a:r>
-            <a:endParaRPr kumimoji="1" lang="zh-CN" altLang="en-US"/>
           </a:p>
           <a:p>
             <a:pPr lvl="2"/>
@@ -1139,7 +1173,6 @@
               <a:rPr kumimoji="1" lang="zh-CN" altLang="en-US"/>
               <a:t>三级</a:t>
             </a:r>
-            <a:endParaRPr kumimoji="1" lang="zh-CN" altLang="en-US"/>
           </a:p>
           <a:p>
             <a:pPr lvl="3"/>
@@ -1147,7 +1180,6 @@
               <a:rPr kumimoji="1" lang="zh-CN" altLang="en-US"/>
               <a:t>四级</a:t>
             </a:r>
-            <a:endParaRPr kumimoji="1" lang="zh-CN" altLang="en-US"/>
           </a:p>
           <a:p>
             <a:pPr lvl="4"/>
@@ -1155,7 +1187,6 @@
               <a:rPr kumimoji="1" lang="zh-CN" altLang="en-US"/>
               <a:t>五级</a:t>
             </a:r>
-            <a:endParaRPr kumimoji="1" lang="zh-CN" altLang="en-US"/>
           </a:p>
         </p:txBody>
       </p:sp>
@@ -1176,6 +1207,7 @@
           <a:p>
             <a:fld id="{BFB87016-819A-5341-A389-7551C78F7E31}" type="datetimeFigureOut">
               <a:rPr kumimoji="1" lang="zh-CN" altLang="en-US" smtClean="0"/>
+              <a:t>2026/3/24</a:t>
             </a:fld>
             <a:endParaRPr kumimoji="1" lang="zh-CN" altLang="en-US"/>
           </a:p>
@@ -1217,6 +1249,7 @@
           <a:p>
             <a:fld id="{ABBC389F-5C18-E04C-BAC7-584A3B16DFF8}" type="slidenum">
               <a:rPr kumimoji="1" lang="zh-CN" altLang="en-US" smtClean="0"/>
+              <a:t>‹#›</a:t>
             </a:fld>
             <a:endParaRPr kumimoji="1" lang="zh-CN" altLang="en-US"/>
           </a:p>
@@ -1362,7 +1395,15 @@
             <p:ph type="title"/>
           </p:nvPr>
         </p:nvSpPr>
-        <p:spPr/>
+        <p:spPr>
+          <a:xfrm>
+            <a:off x="838200" y="365125"/>
+            <a:ext cx="10515600" cy="1325563"/>
+          </a:xfrm>
+          <a:prstGeom prst="rect">
+            <a:avLst/>
+          </a:prstGeom>
+        </p:spPr>
         <p:txBody>
           <a:bodyPr/>
           <a:lstStyle/>
@@ -1371,7 +1412,6 @@
               <a:rPr kumimoji="1" lang="zh-CN" altLang="en-US"/>
               <a:t>单击此处编辑母版标题样式</a:t>
             </a:r>
-            <a:endParaRPr kumimoji="1" lang="zh-CN" altLang="en-US"/>
           </a:p>
         </p:txBody>
       </p:sp>
@@ -1385,7 +1425,15 @@
             <p:ph idx="1"/>
           </p:nvPr>
         </p:nvSpPr>
-        <p:spPr/>
+        <p:spPr>
+          <a:xfrm>
+            <a:off x="838200" y="1825625"/>
+            <a:ext cx="10515600" cy="4351338"/>
+          </a:xfrm>
+          <a:prstGeom prst="rect">
+            <a:avLst/>
+          </a:prstGeom>
+        </p:spPr>
         <p:txBody>
           <a:bodyPr/>
           <a:lstStyle/>
@@ -1395,7 +1443,6 @@
               <a:rPr kumimoji="1" lang="zh-CN" altLang="en-US"/>
               <a:t>单击此处编辑母版文本样式</a:t>
             </a:r>
-            <a:endParaRPr kumimoji="1" lang="zh-CN" altLang="en-US"/>
           </a:p>
           <a:p>
             <a:pPr lvl="1"/>
@@ -1403,7 +1450,6 @@
               <a:rPr kumimoji="1" lang="zh-CN" altLang="en-US"/>
               <a:t>二级</a:t>
             </a:r>
-            <a:endParaRPr kumimoji="1" lang="zh-CN" altLang="en-US"/>
           </a:p>
           <a:p>
             <a:pPr lvl="2"/>
@@ -1411,7 +1457,6 @@
               <a:rPr kumimoji="1" lang="zh-CN" altLang="en-US"/>
               <a:t>三级</a:t>
             </a:r>
-            <a:endParaRPr kumimoji="1" lang="zh-CN" altLang="en-US"/>
           </a:p>
           <a:p>
             <a:pPr lvl="3"/>
@@ -1419,7 +1464,6 @@
               <a:rPr kumimoji="1" lang="zh-CN" altLang="en-US"/>
               <a:t>四级</a:t>
             </a:r>
-            <a:endParaRPr kumimoji="1" lang="zh-CN" altLang="en-US"/>
           </a:p>
           <a:p>
             <a:pPr lvl="4"/>
@@ -1427,7 +1471,6 @@
               <a:rPr kumimoji="1" lang="zh-CN" altLang="en-US"/>
               <a:t>五级</a:t>
             </a:r>
-            <a:endParaRPr kumimoji="1" lang="zh-CN" altLang="en-US"/>
           </a:p>
         </p:txBody>
       </p:sp>
@@ -1448,6 +1491,7 @@
           <a:p>
             <a:fld id="{BFB87016-819A-5341-A389-7551C78F7E31}" type="datetimeFigureOut">
               <a:rPr kumimoji="1" lang="zh-CN" altLang="en-US" smtClean="0"/>
+              <a:t>2026/3/24</a:t>
             </a:fld>
             <a:endParaRPr kumimoji="1" lang="zh-CN" altLang="en-US"/>
           </a:p>
@@ -1489,6 +1533,7 @@
           <a:p>
             <a:fld id="{ABBC389F-5C18-E04C-BAC7-584A3B16DFF8}" type="slidenum">
               <a:rPr kumimoji="1" lang="zh-CN" altLang="en-US" smtClean="0"/>
+              <a:t>‹#›</a:t>
             </a:fld>
             <a:endParaRPr kumimoji="1" lang="zh-CN" altLang="en-US"/>
           </a:p>
@@ -1534,6 +1579,9 @@
             <a:off x="831850" y="1709738"/>
             <a:ext cx="10515600" cy="2852737"/>
           </a:xfrm>
+          <a:prstGeom prst="rect">
+            <a:avLst/>
+          </a:prstGeom>
         </p:spPr>
         <p:txBody>
           <a:bodyPr anchor="b"/>
@@ -1547,7 +1595,6 @@
               <a:rPr kumimoji="1" lang="zh-CN" altLang="en-US"/>
               <a:t>单击此处编辑母版标题样式</a:t>
             </a:r>
-            <a:endParaRPr kumimoji="1" lang="zh-CN" altLang="en-US"/>
           </a:p>
         </p:txBody>
       </p:sp>
@@ -1566,6 +1613,9 @@
             <a:off x="831850" y="4589463"/>
             <a:ext cx="10515600" cy="1500187"/>
           </a:xfrm>
+          <a:prstGeom prst="rect">
+            <a:avLst/>
+          </a:prstGeom>
         </p:spPr>
         <p:txBody>
           <a:bodyPr/>
@@ -1667,7 +1717,6 @@
               <a:rPr kumimoji="1" lang="zh-CN" altLang="en-US"/>
               <a:t>单击此处编辑母版文本样式</a:t>
             </a:r>
-            <a:endParaRPr kumimoji="1" lang="zh-CN" altLang="en-US"/>
           </a:p>
         </p:txBody>
       </p:sp>
@@ -1688,6 +1737,7 @@
           <a:p>
             <a:fld id="{BFB87016-819A-5341-A389-7551C78F7E31}" type="datetimeFigureOut">
               <a:rPr kumimoji="1" lang="zh-CN" altLang="en-US" smtClean="0"/>
+              <a:t>2026/3/24</a:t>
             </a:fld>
             <a:endParaRPr kumimoji="1" lang="zh-CN" altLang="en-US"/>
           </a:p>
@@ -1729,6 +1779,7 @@
           <a:p>
             <a:fld id="{ABBC389F-5C18-E04C-BAC7-584A3B16DFF8}" type="slidenum">
               <a:rPr kumimoji="1" lang="zh-CN" altLang="en-US" smtClean="0"/>
+              <a:t>‹#›</a:t>
             </a:fld>
             <a:endParaRPr kumimoji="1" lang="zh-CN" altLang="en-US"/>
           </a:p>
@@ -1769,7 +1820,15 @@
             <p:ph type="title"/>
           </p:nvPr>
         </p:nvSpPr>
-        <p:spPr/>
+        <p:spPr>
+          <a:xfrm>
+            <a:off x="838200" y="365125"/>
+            <a:ext cx="10515600" cy="1325563"/>
+          </a:xfrm>
+          <a:prstGeom prst="rect">
+            <a:avLst/>
+          </a:prstGeom>
+        </p:spPr>
         <p:txBody>
           <a:bodyPr/>
           <a:lstStyle/>
@@ -1778,7 +1837,6 @@
               <a:rPr kumimoji="1" lang="zh-CN" altLang="en-US"/>
               <a:t>单击此处编辑母版标题样式</a:t>
             </a:r>
-            <a:endParaRPr kumimoji="1" lang="zh-CN" altLang="en-US"/>
           </a:p>
         </p:txBody>
       </p:sp>
@@ -1797,6 +1855,9 @@
             <a:off x="838200" y="1825625"/>
             <a:ext cx="5181600" cy="4351338"/>
           </a:xfrm>
+          <a:prstGeom prst="rect">
+            <a:avLst/>
+          </a:prstGeom>
         </p:spPr>
         <p:txBody>
           <a:bodyPr/>
@@ -1807,7 +1868,6 @@
               <a:rPr kumimoji="1" lang="zh-CN" altLang="en-US"/>
               <a:t>单击此处编辑母版文本样式</a:t>
             </a:r>
-            <a:endParaRPr kumimoji="1" lang="zh-CN" altLang="en-US"/>
           </a:p>
           <a:p>
             <a:pPr lvl="1"/>
@@ -1815,7 +1875,6 @@
               <a:rPr kumimoji="1" lang="zh-CN" altLang="en-US"/>
               <a:t>二级</a:t>
             </a:r>
-            <a:endParaRPr kumimoji="1" lang="zh-CN" altLang="en-US"/>
           </a:p>
           <a:p>
             <a:pPr lvl="2"/>
@@ -1823,7 +1882,6 @@
               <a:rPr kumimoji="1" lang="zh-CN" altLang="en-US"/>
               <a:t>三级</a:t>
             </a:r>
-            <a:endParaRPr kumimoji="1" lang="zh-CN" altLang="en-US"/>
           </a:p>
           <a:p>
             <a:pPr lvl="3"/>
@@ -1831,7 +1889,6 @@
               <a:rPr kumimoji="1" lang="zh-CN" altLang="en-US"/>
               <a:t>四级</a:t>
             </a:r>
-            <a:endParaRPr kumimoji="1" lang="zh-CN" altLang="en-US"/>
           </a:p>
           <a:p>
             <a:pPr lvl="4"/>
@@ -1839,7 +1896,6 @@
               <a:rPr kumimoji="1" lang="zh-CN" altLang="en-US"/>
               <a:t>五级</a:t>
             </a:r>
-            <a:endParaRPr kumimoji="1" lang="zh-CN" altLang="en-US"/>
           </a:p>
         </p:txBody>
       </p:sp>
@@ -1858,6 +1914,9 @@
             <a:off x="6172200" y="1825625"/>
             <a:ext cx="5181600" cy="4351338"/>
           </a:xfrm>
+          <a:prstGeom prst="rect">
+            <a:avLst/>
+          </a:prstGeom>
         </p:spPr>
         <p:txBody>
           <a:bodyPr/>
@@ -1868,7 +1927,6 @@
               <a:rPr kumimoji="1" lang="zh-CN" altLang="en-US"/>
               <a:t>单击此处编辑母版文本样式</a:t>
             </a:r>
-            <a:endParaRPr kumimoji="1" lang="zh-CN" altLang="en-US"/>
           </a:p>
           <a:p>
             <a:pPr lvl="1"/>
@@ -1876,7 +1934,6 @@
               <a:rPr kumimoji="1" lang="zh-CN" altLang="en-US"/>
               <a:t>二级</a:t>
             </a:r>
-            <a:endParaRPr kumimoji="1" lang="zh-CN" altLang="en-US"/>
           </a:p>
           <a:p>
             <a:pPr lvl="2"/>
@@ -1884,7 +1941,6 @@
               <a:rPr kumimoji="1" lang="zh-CN" altLang="en-US"/>
               <a:t>三级</a:t>
             </a:r>
-            <a:endParaRPr kumimoji="1" lang="zh-CN" altLang="en-US"/>
           </a:p>
           <a:p>
             <a:pPr lvl="3"/>
@@ -1892,7 +1948,6 @@
               <a:rPr kumimoji="1" lang="zh-CN" altLang="en-US"/>
               <a:t>四级</a:t>
             </a:r>
-            <a:endParaRPr kumimoji="1" lang="zh-CN" altLang="en-US"/>
           </a:p>
           <a:p>
             <a:pPr lvl="4"/>
@@ -1900,7 +1955,6 @@
               <a:rPr kumimoji="1" lang="zh-CN" altLang="en-US"/>
               <a:t>五级</a:t>
             </a:r>
-            <a:endParaRPr kumimoji="1" lang="zh-CN" altLang="en-US"/>
           </a:p>
         </p:txBody>
       </p:sp>
@@ -1921,6 +1975,7 @@
           <a:p>
             <a:fld id="{BFB87016-819A-5341-A389-7551C78F7E31}" type="datetimeFigureOut">
               <a:rPr kumimoji="1" lang="zh-CN" altLang="en-US" smtClean="0"/>
+              <a:t>2026/3/24</a:t>
             </a:fld>
             <a:endParaRPr kumimoji="1" lang="zh-CN" altLang="en-US"/>
           </a:p>
@@ -1962,6 +2017,7 @@
           <a:p>
             <a:fld id="{ABBC389F-5C18-E04C-BAC7-584A3B16DFF8}" type="slidenum">
               <a:rPr kumimoji="1" lang="zh-CN" altLang="en-US" smtClean="0"/>
+              <a:t>‹#›</a:t>
             </a:fld>
             <a:endParaRPr kumimoji="1" lang="zh-CN" altLang="en-US"/>
           </a:p>
@@ -2007,6 +2063,9 @@
             <a:off x="839788" y="365125"/>
             <a:ext cx="10515600" cy="1325563"/>
           </a:xfrm>
+          <a:prstGeom prst="rect">
+            <a:avLst/>
+          </a:prstGeom>
         </p:spPr>
         <p:txBody>
           <a:bodyPr/>
@@ -2016,7 +2075,6 @@
               <a:rPr kumimoji="1" lang="zh-CN" altLang="en-US"/>
               <a:t>单击此处编辑母版标题样式</a:t>
             </a:r>
-            <a:endParaRPr kumimoji="1" lang="zh-CN" altLang="en-US"/>
           </a:p>
         </p:txBody>
       </p:sp>
@@ -2035,6 +2093,9 @@
             <a:off x="839788" y="1681163"/>
             <a:ext cx="5157787" cy="823912"/>
           </a:xfrm>
+          <a:prstGeom prst="rect">
+            <a:avLst/>
+          </a:prstGeom>
         </p:spPr>
         <p:txBody>
           <a:bodyPr anchor="b"/>
@@ -2082,7 +2143,6 @@
               <a:rPr kumimoji="1" lang="zh-CN" altLang="en-US"/>
               <a:t>单击此处编辑母版文本样式</a:t>
             </a:r>
-            <a:endParaRPr kumimoji="1" lang="zh-CN" altLang="en-US"/>
           </a:p>
         </p:txBody>
       </p:sp>
@@ -2101,6 +2161,9 @@
             <a:off x="839788" y="2505075"/>
             <a:ext cx="5157787" cy="3684588"/>
           </a:xfrm>
+          <a:prstGeom prst="rect">
+            <a:avLst/>
+          </a:prstGeom>
         </p:spPr>
         <p:txBody>
           <a:bodyPr/>
@@ -2111,7 +2174,6 @@
               <a:rPr kumimoji="1" lang="zh-CN" altLang="en-US"/>
               <a:t>单击此处编辑母版文本样式</a:t>
             </a:r>
-            <a:endParaRPr kumimoji="1" lang="zh-CN" altLang="en-US"/>
           </a:p>
           <a:p>
             <a:pPr lvl="1"/>
@@ -2119,7 +2181,6 @@
               <a:rPr kumimoji="1" lang="zh-CN" altLang="en-US"/>
               <a:t>二级</a:t>
             </a:r>
-            <a:endParaRPr kumimoji="1" lang="zh-CN" altLang="en-US"/>
           </a:p>
           <a:p>
             <a:pPr lvl="2"/>
@@ -2127,7 +2188,6 @@
               <a:rPr kumimoji="1" lang="zh-CN" altLang="en-US"/>
               <a:t>三级</a:t>
             </a:r>
-            <a:endParaRPr kumimoji="1" lang="zh-CN" altLang="en-US"/>
           </a:p>
           <a:p>
             <a:pPr lvl="3"/>
@@ -2135,7 +2195,6 @@
               <a:rPr kumimoji="1" lang="zh-CN" altLang="en-US"/>
               <a:t>四级</a:t>
             </a:r>
-            <a:endParaRPr kumimoji="1" lang="zh-CN" altLang="en-US"/>
           </a:p>
           <a:p>
             <a:pPr lvl="4"/>
@@ -2143,7 +2202,6 @@
               <a:rPr kumimoji="1" lang="zh-CN" altLang="en-US"/>
               <a:t>五级</a:t>
             </a:r>
-            <a:endParaRPr kumimoji="1" lang="zh-CN" altLang="en-US"/>
           </a:p>
         </p:txBody>
       </p:sp>
@@ -2162,6 +2220,9 @@
             <a:off x="6172200" y="1681163"/>
             <a:ext cx="5183188" cy="823912"/>
           </a:xfrm>
+          <a:prstGeom prst="rect">
+            <a:avLst/>
+          </a:prstGeom>
         </p:spPr>
         <p:txBody>
           <a:bodyPr anchor="b"/>
@@ -2209,7 +2270,6 @@
               <a:rPr kumimoji="1" lang="zh-CN" altLang="en-US"/>
               <a:t>单击此处编辑母版文本样式</a:t>
             </a:r>
-            <a:endParaRPr kumimoji="1" lang="zh-CN" altLang="en-US"/>
           </a:p>
         </p:txBody>
       </p:sp>
@@ -2228,6 +2288,9 @@
             <a:off x="6172200" y="2505075"/>
             <a:ext cx="5183188" cy="3684588"/>
           </a:xfrm>
+          <a:prstGeom prst="rect">
+            <a:avLst/>
+          </a:prstGeom>
         </p:spPr>
         <p:txBody>
           <a:bodyPr/>
@@ -2238,7 +2301,6 @@
               <a:rPr kumimoji="1" lang="zh-CN" altLang="en-US"/>
               <a:t>单击此处编辑母版文本样式</a:t>
             </a:r>
-            <a:endParaRPr kumimoji="1" lang="zh-CN" altLang="en-US"/>
           </a:p>
           <a:p>
             <a:pPr lvl="1"/>
@@ -2246,7 +2308,6 @@
               <a:rPr kumimoji="1" lang="zh-CN" altLang="en-US"/>
               <a:t>二级</a:t>
             </a:r>
-            <a:endParaRPr kumimoji="1" lang="zh-CN" altLang="en-US"/>
           </a:p>
           <a:p>
             <a:pPr lvl="2"/>
@@ -2254,7 +2315,6 @@
               <a:rPr kumimoji="1" lang="zh-CN" altLang="en-US"/>
               <a:t>三级</a:t>
             </a:r>
-            <a:endParaRPr kumimoji="1" lang="zh-CN" altLang="en-US"/>
           </a:p>
           <a:p>
             <a:pPr lvl="3"/>
@@ -2262,7 +2322,6 @@
               <a:rPr kumimoji="1" lang="zh-CN" altLang="en-US"/>
               <a:t>四级</a:t>
             </a:r>
-            <a:endParaRPr kumimoji="1" lang="zh-CN" altLang="en-US"/>
           </a:p>
           <a:p>
             <a:pPr lvl="4"/>
@@ -2270,7 +2329,6 @@
               <a:rPr kumimoji="1" lang="zh-CN" altLang="en-US"/>
               <a:t>五级</a:t>
             </a:r>
-            <a:endParaRPr kumimoji="1" lang="zh-CN" altLang="en-US"/>
           </a:p>
         </p:txBody>
       </p:sp>
@@ -2291,6 +2349,7 @@
           <a:p>
             <a:fld id="{BFB87016-819A-5341-A389-7551C78F7E31}" type="datetimeFigureOut">
               <a:rPr kumimoji="1" lang="zh-CN" altLang="en-US" smtClean="0"/>
+              <a:t>2026/3/24</a:t>
             </a:fld>
             <a:endParaRPr kumimoji="1" lang="zh-CN" altLang="en-US"/>
           </a:p>
@@ -2332,6 +2391,7 @@
           <a:p>
             <a:fld id="{ABBC389F-5C18-E04C-BAC7-584A3B16DFF8}" type="slidenum">
               <a:rPr kumimoji="1" lang="zh-CN" altLang="en-US" smtClean="0"/>
+              <a:t>‹#›</a:t>
             </a:fld>
             <a:endParaRPr kumimoji="1" lang="zh-CN" altLang="en-US"/>
           </a:p>
@@ -2372,7 +2432,15 @@
             <p:ph type="title"/>
           </p:nvPr>
         </p:nvSpPr>
-        <p:spPr/>
+        <p:spPr>
+          <a:xfrm>
+            <a:off x="838200" y="365125"/>
+            <a:ext cx="10515600" cy="1325563"/>
+          </a:xfrm>
+          <a:prstGeom prst="rect">
+            <a:avLst/>
+          </a:prstGeom>
+        </p:spPr>
         <p:txBody>
           <a:bodyPr/>
           <a:lstStyle/>
@@ -2381,7 +2449,6 @@
               <a:rPr kumimoji="1" lang="zh-CN" altLang="en-US"/>
               <a:t>单击此处编辑母版标题样式</a:t>
             </a:r>
-            <a:endParaRPr kumimoji="1" lang="zh-CN" altLang="en-US"/>
           </a:p>
         </p:txBody>
       </p:sp>
@@ -2402,6 +2469,7 @@
           <a:p>
             <a:fld id="{BFB87016-819A-5341-A389-7551C78F7E31}" type="datetimeFigureOut">
               <a:rPr kumimoji="1" lang="zh-CN" altLang="en-US" smtClean="0"/>
+              <a:t>2026/3/24</a:t>
             </a:fld>
             <a:endParaRPr kumimoji="1" lang="zh-CN" altLang="en-US"/>
           </a:p>
@@ -2443,6 +2511,7 @@
           <a:p>
             <a:fld id="{ABBC389F-5C18-E04C-BAC7-584A3B16DFF8}" type="slidenum">
               <a:rPr kumimoji="1" lang="zh-CN" altLang="en-US" smtClean="0"/>
+              <a:t>‹#›</a:t>
             </a:fld>
             <a:endParaRPr kumimoji="1" lang="zh-CN" altLang="en-US"/>
           </a:p>
@@ -2490,6 +2559,7 @@
           <a:p>
             <a:fld id="{BFB87016-819A-5341-A389-7551C78F7E31}" type="datetimeFigureOut">
               <a:rPr kumimoji="1" lang="zh-CN" altLang="en-US" smtClean="0"/>
+              <a:t>2026/3/24</a:t>
             </a:fld>
             <a:endParaRPr kumimoji="1" lang="zh-CN" altLang="en-US"/>
           </a:p>
@@ -2531,6 +2601,7 @@
           <a:p>
             <a:fld id="{ABBC389F-5C18-E04C-BAC7-584A3B16DFF8}" type="slidenum">
               <a:rPr kumimoji="1" lang="zh-CN" altLang="en-US" smtClean="0"/>
+              <a:t>‹#›</a:t>
             </a:fld>
             <a:endParaRPr kumimoji="1" lang="zh-CN" altLang="en-US"/>
           </a:p>
@@ -2576,6 +2647,9 @@
             <a:off x="839788" y="457200"/>
             <a:ext cx="3932237" cy="1600200"/>
           </a:xfrm>
+          <a:prstGeom prst="rect">
+            <a:avLst/>
+          </a:prstGeom>
         </p:spPr>
         <p:txBody>
           <a:bodyPr anchor="b"/>
@@ -2589,7 +2663,6 @@
               <a:rPr kumimoji="1" lang="zh-CN" altLang="en-US"/>
               <a:t>单击此处编辑母版标题样式</a:t>
             </a:r>
-            <a:endParaRPr kumimoji="1" lang="zh-CN" altLang="en-US"/>
           </a:p>
         </p:txBody>
       </p:sp>
@@ -2608,6 +2681,9 @@
             <a:off x="5183188" y="987425"/>
             <a:ext cx="6172200" cy="4873625"/>
           </a:xfrm>
+          <a:prstGeom prst="rect">
+            <a:avLst/>
+          </a:prstGeom>
         </p:spPr>
         <p:txBody>
           <a:bodyPr/>
@@ -2646,7 +2722,6 @@
               <a:rPr kumimoji="1" lang="zh-CN" altLang="en-US"/>
               <a:t>单击此处编辑母版文本样式</a:t>
             </a:r>
-            <a:endParaRPr kumimoji="1" lang="zh-CN" altLang="en-US"/>
           </a:p>
           <a:p>
             <a:pPr lvl="1"/>
@@ -2654,7 +2729,6 @@
               <a:rPr kumimoji="1" lang="zh-CN" altLang="en-US"/>
               <a:t>二级</a:t>
             </a:r>
-            <a:endParaRPr kumimoji="1" lang="zh-CN" altLang="en-US"/>
           </a:p>
           <a:p>
             <a:pPr lvl="2"/>
@@ -2662,7 +2736,6 @@
               <a:rPr kumimoji="1" lang="zh-CN" altLang="en-US"/>
               <a:t>三级</a:t>
             </a:r>
-            <a:endParaRPr kumimoji="1" lang="zh-CN" altLang="en-US"/>
           </a:p>
           <a:p>
             <a:pPr lvl="3"/>
@@ -2670,7 +2743,6 @@
               <a:rPr kumimoji="1" lang="zh-CN" altLang="en-US"/>
               <a:t>四级</a:t>
             </a:r>
-            <a:endParaRPr kumimoji="1" lang="zh-CN" altLang="en-US"/>
           </a:p>
           <a:p>
             <a:pPr lvl="4"/>
@@ -2678,7 +2750,6 @@
               <a:rPr kumimoji="1" lang="zh-CN" altLang="en-US"/>
               <a:t>五级</a:t>
             </a:r>
-            <a:endParaRPr kumimoji="1" lang="zh-CN" altLang="en-US"/>
           </a:p>
         </p:txBody>
       </p:sp>
@@ -2697,6 +2768,9 @@
             <a:off x="839788" y="2057400"/>
             <a:ext cx="3932237" cy="3811588"/>
           </a:xfrm>
+          <a:prstGeom prst="rect">
+            <a:avLst/>
+          </a:prstGeom>
         </p:spPr>
         <p:txBody>
           <a:bodyPr/>
@@ -2744,7 +2818,6 @@
               <a:rPr kumimoji="1" lang="zh-CN" altLang="en-US"/>
               <a:t>单击此处编辑母版文本样式</a:t>
             </a:r>
-            <a:endParaRPr kumimoji="1" lang="zh-CN" altLang="en-US"/>
           </a:p>
         </p:txBody>
       </p:sp>
@@ -2765,6 +2838,7 @@
           <a:p>
             <a:fld id="{BFB87016-819A-5341-A389-7551C78F7E31}" type="datetimeFigureOut">
               <a:rPr kumimoji="1" lang="zh-CN" altLang="en-US" smtClean="0"/>
+              <a:t>2026/3/24</a:t>
             </a:fld>
             <a:endParaRPr kumimoji="1" lang="zh-CN" altLang="en-US"/>
           </a:p>
@@ -2806,6 +2880,7 @@
           <a:p>
             <a:fld id="{ABBC389F-5C18-E04C-BAC7-584A3B16DFF8}" type="slidenum">
               <a:rPr kumimoji="1" lang="zh-CN" altLang="en-US" smtClean="0"/>
+              <a:t>‹#›</a:t>
             </a:fld>
             <a:endParaRPr kumimoji="1" lang="zh-CN" altLang="en-US"/>
           </a:p>
@@ -2851,6 +2926,9 @@
             <a:off x="839788" y="457200"/>
             <a:ext cx="3932237" cy="1600200"/>
           </a:xfrm>
+          <a:prstGeom prst="rect">
+            <a:avLst/>
+          </a:prstGeom>
         </p:spPr>
         <p:txBody>
           <a:bodyPr anchor="b"/>
@@ -2864,7 +2942,6 @@
               <a:rPr kumimoji="1" lang="zh-CN" altLang="en-US"/>
               <a:t>单击此处编辑母版标题样式</a:t>
             </a:r>
-            <a:endParaRPr kumimoji="1" lang="zh-CN" altLang="en-US"/>
           </a:p>
         </p:txBody>
       </p:sp>
@@ -2883,6 +2960,9 @@
             <a:off x="5183188" y="987425"/>
             <a:ext cx="6172200" cy="4873625"/>
           </a:xfrm>
+          <a:prstGeom prst="rect">
+            <a:avLst/>
+          </a:prstGeom>
         </p:spPr>
         <p:txBody>
           <a:bodyPr/>
@@ -2944,6 +3024,9 @@
             <a:off x="839788" y="2057400"/>
             <a:ext cx="3932237" cy="3811588"/>
           </a:xfrm>
+          <a:prstGeom prst="rect">
+            <a:avLst/>
+          </a:prstGeom>
         </p:spPr>
         <p:txBody>
           <a:bodyPr/>
@@ -2991,7 +3074,6 @@
               <a:rPr kumimoji="1" lang="zh-CN" altLang="en-US"/>
               <a:t>单击此处编辑母版文本样式</a:t>
             </a:r>
-            <a:endParaRPr kumimoji="1" lang="zh-CN" altLang="en-US"/>
           </a:p>
         </p:txBody>
       </p:sp>
@@ -3012,6 +3094,7 @@
           <a:p>
             <a:fld id="{BFB87016-819A-5341-A389-7551C78F7E31}" type="datetimeFigureOut">
               <a:rPr kumimoji="1" lang="zh-CN" altLang="en-US" smtClean="0"/>
+              <a:t>2026/3/24</a:t>
             </a:fld>
             <a:endParaRPr kumimoji="1" lang="zh-CN" altLang="en-US"/>
           </a:p>
@@ -3053,6 +3136,7 @@
           <a:p>
             <a:fld id="{ABBC389F-5C18-E04C-BAC7-584A3B16DFF8}" type="slidenum">
               <a:rPr kumimoji="1" lang="zh-CN" altLang="en-US" smtClean="0"/>
+              <a:t>‹#›</a:t>
             </a:fld>
             <a:endParaRPr kumimoji="1" lang="zh-CN" altLang="en-US"/>
           </a:p>
@@ -3090,105 +3174,6 @@
       </p:grpSpPr>
       <p:sp>
         <p:nvSpPr>
-          <p:cNvPr id="2" name="标题占位符 1"/>
-          <p:cNvSpPr>
-            <a:spLocks noGrp="1"/>
-          </p:cNvSpPr>
-          <p:nvPr>
-            <p:ph type="title"/>
-          </p:nvPr>
-        </p:nvSpPr>
-        <p:spPr>
-          <a:xfrm>
-            <a:off x="838200" y="365125"/>
-            <a:ext cx="10515600" cy="1325563"/>
-          </a:xfrm>
-          <a:prstGeom prst="rect">
-            <a:avLst/>
-          </a:prstGeom>
-        </p:spPr>
-        <p:txBody>
-          <a:bodyPr vert="horz" lIns="91440" tIns="45720" rIns="91440" bIns="45720" rtlCol="0" anchor="ctr">
-            <a:normAutofit/>
-          </a:bodyPr>
-          <a:lstStyle/>
-          <a:p>
-            <a:r>
-              <a:rPr kumimoji="1" lang="zh-CN" altLang="en-US"/>
-              <a:t>单击此处编辑母版标题样式</a:t>
-            </a:r>
-            <a:endParaRPr kumimoji="1" lang="zh-CN" altLang="en-US"/>
-          </a:p>
-        </p:txBody>
-      </p:sp>
-      <p:sp>
-        <p:nvSpPr>
-          <p:cNvPr id="3" name="文本占位符 2"/>
-          <p:cNvSpPr>
-            <a:spLocks noGrp="1"/>
-          </p:cNvSpPr>
-          <p:nvPr>
-            <p:ph type="body" idx="1"/>
-          </p:nvPr>
-        </p:nvSpPr>
-        <p:spPr>
-          <a:xfrm>
-            <a:off x="838200" y="1825625"/>
-            <a:ext cx="10515600" cy="4351338"/>
-          </a:xfrm>
-          <a:prstGeom prst="rect">
-            <a:avLst/>
-          </a:prstGeom>
-        </p:spPr>
-        <p:txBody>
-          <a:bodyPr vert="horz" lIns="91440" tIns="45720" rIns="91440" bIns="45720" rtlCol="0">
-            <a:normAutofit/>
-          </a:bodyPr>
-          <a:lstStyle/>
-          <a:p>
-            <a:pPr lvl="0"/>
-            <a:r>
-              <a:rPr kumimoji="1" lang="zh-CN" altLang="en-US"/>
-              <a:t>单击此处编辑母版文本样式</a:t>
-            </a:r>
-            <a:endParaRPr kumimoji="1" lang="zh-CN" altLang="en-US"/>
-          </a:p>
-          <a:p>
-            <a:pPr lvl="1"/>
-            <a:r>
-              <a:rPr kumimoji="1" lang="zh-CN" altLang="en-US"/>
-              <a:t>二级</a:t>
-            </a:r>
-            <a:endParaRPr kumimoji="1" lang="zh-CN" altLang="en-US"/>
-          </a:p>
-          <a:p>
-            <a:pPr lvl="2"/>
-            <a:r>
-              <a:rPr kumimoji="1" lang="zh-CN" altLang="en-US"/>
-              <a:t>三级</a:t>
-            </a:r>
-            <a:endParaRPr kumimoji="1" lang="zh-CN" altLang="en-US"/>
-          </a:p>
-          <a:p>
-            <a:pPr lvl="3"/>
-            <a:r>
-              <a:rPr kumimoji="1" lang="zh-CN" altLang="en-US"/>
-              <a:t>四级</a:t>
-            </a:r>
-            <a:endParaRPr kumimoji="1" lang="zh-CN" altLang="en-US"/>
-          </a:p>
-          <a:p>
-            <a:pPr lvl="4"/>
-            <a:r>
-              <a:rPr kumimoji="1" lang="zh-CN" altLang="en-US"/>
-              <a:t>五级</a:t>
-            </a:r>
-            <a:endParaRPr kumimoji="1" lang="zh-CN" altLang="en-US"/>
-          </a:p>
-        </p:txBody>
-      </p:sp>
-      <p:sp>
-        <p:nvSpPr>
           <p:cNvPr id="4" name="日期占位符 3"/>
           <p:cNvSpPr>
             <a:spLocks noGrp="1"/>
@@ -3222,6 +3207,7 @@
           <a:p>
             <a:fld id="{BFB87016-819A-5341-A389-7551C78F7E31}" type="datetimeFigureOut">
               <a:rPr kumimoji="1" lang="zh-CN" altLang="en-US" smtClean="0"/>
+              <a:t>2026/3/24</a:t>
             </a:fld>
             <a:endParaRPr kumimoji="1" lang="zh-CN" altLang="en-US"/>
           </a:p>
@@ -3299,6 +3285,7 @@
           <a:p>
             <a:fld id="{ABBC389F-5C18-E04C-BAC7-584A3B16DFF8}" type="slidenum">
               <a:rPr kumimoji="1" lang="zh-CN" altLang="en-US" smtClean="0"/>
+              <a:t>‹#›</a:t>
             </a:fld>
             <a:endParaRPr kumimoji="1" lang="zh-CN" altLang="en-US"/>
           </a:p>
@@ -3392,17 +3379,6 @@
                 </a:rPr>
                 <a:t>最佳实践</a:t>
               </a:r>
-              <a:endParaRPr lang="zh-CN" altLang="en-US" sz="800" b="0" i="0" dirty="0">
-                <a:solidFill>
-                  <a:schemeClr val="tx1">
-                    <a:lumMod val="50000"/>
-                    <a:lumOff val="50000"/>
-                  </a:schemeClr>
-                </a:solidFill>
-                <a:latin typeface="Microsoft YaHei Light" panose="020B0503020204020204" pitchFamily="34" charset="-122"/>
-                <a:ea typeface="Microsoft YaHei Light" panose="020B0503020204020204" pitchFamily="34" charset="-122"/>
-                <a:cs typeface="阿里巴巴普惠体 H" panose="00020600040101010101" pitchFamily="18" charset="-122"/>
-              </a:endParaRPr>
             </a:p>
           </p:txBody>
         </p:sp>
@@ -3572,7 +3548,6 @@
                 <a:rPr lang="en-US" altLang="zh-CN" dirty="0"/>
                 <a:t>Best Practices for Authentic Materials</a:t>
               </a:r>
-              <a:endParaRPr lang="en-US" altLang="zh-CN" dirty="0"/>
             </a:p>
           </p:txBody>
         </p:sp>
@@ -3619,7 +3594,6 @@
                 <a:rPr lang="zh-CN" altLang="en-US" dirty="0"/>
                 <a:t>Guangdong Zhenjia Enterprise Management Consulting Co., Ltd.</a:t>
               </a:r>
-              <a:endParaRPr lang="zh-CN" altLang="en-US" dirty="0"/>
             </a:p>
           </p:txBody>
         </p:sp>
@@ -3632,22 +3606,22 @@
         </p:nvGrpSpPr>
         <p:grpSpPr>
           <a:xfrm>
-            <a:off x="-319710" y="58769"/>
-            <a:ext cx="2278271" cy="356311"/>
-            <a:chOff x="2740000" y="2927708"/>
-            <a:chExt cx="1851094" cy="289504"/>
+            <a:off x="-300990" y="57785"/>
+            <a:ext cx="2278380" cy="384175"/>
+            <a:chOff x="-474" y="91"/>
+            <a:chExt cx="3588" cy="605"/>
           </a:xfrm>
         </p:grpSpPr>
         <p:sp>
           <p:nvSpPr>
-            <p:cNvPr id="14" name="文本框 13"/>
+            <p:cNvPr id="20" name="文本框 19"/>
             <p:cNvSpPr txBox="1"/>
-            <p:nvPr/>
+            <p:nvPr userDrawn="1"/>
           </p:nvSpPr>
           <p:spPr>
             <a:xfrm>
-              <a:off x="2740000" y="2927708"/>
-              <a:ext cx="1851094" cy="212557"/>
+              <a:off x="-474" y="91"/>
+              <a:ext cx="3588" cy="412"/>
             </a:xfrm>
             <a:prstGeom prst="rect">
               <a:avLst/>
@@ -3688,27 +3662,19 @@
                 </a:rPr>
                 <a:t>真佳咨询 </a:t>
               </a:r>
-              <a:endParaRPr lang="zh-CN" altLang="en-US" sz="1100" dirty="0">
-                <a:solidFill>
-                  <a:schemeClr val="tx1">
-                    <a:lumMod val="75000"/>
-                    <a:lumOff val="25000"/>
-                  </a:schemeClr>
-                </a:solidFill>
-              </a:endParaRPr>
             </a:p>
           </p:txBody>
         </p:sp>
         <p:pic>
           <p:nvPicPr>
-            <p:cNvPr id="15" name="图片 14" descr="IMG_2662"/>
+            <p:cNvPr id="21" name="图片 20" descr="IMG_2662"/>
             <p:cNvPicPr>
               <a:picLocks noChangeAspect="1" noChangeArrowheads="1"/>
             </p:cNvPicPr>
-            <p:nvPr/>
+            <p:nvPr userDrawn="1"/>
           </p:nvPicPr>
           <p:blipFill rotWithShape="1">
-            <a:blip r:embed="rId15">
+            <a:blip r:embed="rId16">
               <a:extLst>
                 <a:ext uri="{28A0092B-C50C-407E-A947-70E740481C1C}">
                   <a14:useLocalDpi xmlns:a14="http://schemas.microsoft.com/office/drawing/2010/main" val="0"/>
@@ -3722,8 +3688,8 @@
           </p:blipFill>
           <p:spPr bwMode="auto">
             <a:xfrm>
-              <a:off x="3003692" y="2935612"/>
-              <a:ext cx="487275" cy="273532"/>
+              <a:off x="37" y="104"/>
+              <a:ext cx="944" cy="530"/>
             </a:xfrm>
             <a:prstGeom prst="rect">
               <a:avLst/>
@@ -3755,14 +3721,14 @@
         </p:pic>
         <p:sp>
           <p:nvSpPr>
-            <p:cNvPr id="16" name="文本框 15"/>
+            <p:cNvPr id="22" name="文本框 21"/>
             <p:cNvSpPr txBox="1"/>
-            <p:nvPr/>
+            <p:nvPr userDrawn="1"/>
           </p:nvSpPr>
           <p:spPr>
             <a:xfrm>
-              <a:off x="3365896" y="3052167"/>
-              <a:ext cx="683751" cy="165045"/>
+              <a:off x="739" y="332"/>
+              <a:ext cx="1171" cy="364"/>
             </a:xfrm>
             <a:prstGeom prst="rect">
               <a:avLst/>
@@ -3789,55 +3755,47 @@
               </a:lvl1pPr>
             </a:lstStyle>
             <a:p>
-              <a:pPr algn="l"/>
+              <a:pPr algn="dist"/>
               <a:r>
-                <a:rPr lang="en-US" altLang="zh-CN" b="0" i="0" dirty="0">
+                <a:rPr lang="en-US" altLang="zh-CN" dirty="0">
                   <a:solidFill>
                     <a:schemeClr val="tx1">
                       <a:lumMod val="75000"/>
                       <a:lumOff val="25000"/>
                     </a:schemeClr>
                   </a:solidFill>
-                  <a:latin typeface="Microsoft YaHei Light" panose="020B0503020204020204" pitchFamily="34" charset="-122"/>
-                  <a:ea typeface="Microsoft YaHei Light" panose="020B0503020204020204" pitchFamily="34" charset="-122"/>
                 </a:rPr>
                 <a:t>ZEN</a:t>
               </a:r>
               <a:r>
-                <a:rPr lang="zh-CN" altLang="en-US" b="0" i="0" dirty="0">
+                <a:rPr lang="zh-CN" altLang="en-US" dirty="0">
                   <a:solidFill>
                     <a:schemeClr val="tx1">
                       <a:lumMod val="75000"/>
                       <a:lumOff val="25000"/>
                     </a:schemeClr>
                   </a:solidFill>
-                  <a:latin typeface="Microsoft YaHei Light" panose="020B0503020204020204" pitchFamily="34" charset="-122"/>
-                  <a:ea typeface="Microsoft YaHei Light" panose="020B0503020204020204" pitchFamily="34" charset="-122"/>
                 </a:rPr>
                 <a:t> </a:t>
               </a:r>
               <a:r>
-                <a:rPr lang="en-US" altLang="zh-CN" b="0" i="0" dirty="0">
+                <a:rPr lang="en-US" altLang="zh-CN" dirty="0">
                   <a:solidFill>
                     <a:schemeClr val="tx1">
                       <a:lumMod val="75000"/>
                       <a:lumOff val="25000"/>
                     </a:schemeClr>
                   </a:solidFill>
-                  <a:latin typeface="Microsoft YaHei Light" panose="020B0503020204020204" pitchFamily="34" charset="-122"/>
-                  <a:ea typeface="Microsoft YaHei Light" panose="020B0503020204020204" pitchFamily="34" charset="-122"/>
                 </a:rPr>
                 <a:t>LEAN</a:t>
               </a:r>
-              <a:endParaRPr lang="zh-CN" altLang="en-US" b="0" i="0" dirty="0">
+              <a:endParaRPr lang="zh-CN" altLang="en-US" dirty="0">
                 <a:solidFill>
                   <a:schemeClr val="tx1">
                     <a:lumMod val="75000"/>
                     <a:lumOff val="25000"/>
                   </a:schemeClr>
                 </a:solidFill>
-                <a:latin typeface="Microsoft YaHei Light" panose="020B0503020204020204" pitchFamily="34" charset="-122"/>
-                <a:ea typeface="Microsoft YaHei Light" panose="020B0503020204020204" pitchFamily="34" charset="-122"/>
               </a:endParaRPr>
             </a:p>
           </p:txBody>
@@ -4417,217 +4375,6 @@
           </p:txBody>
         </p:sp>
       </p:grpSp>
-      <p:grpSp>
-        <p:nvGrpSpPr>
-          <p:cNvPr id="8" name="组合 7"/>
-          <p:cNvGrpSpPr/>
-          <p:nvPr userDrawn="1"/>
-        </p:nvGrpSpPr>
-        <p:grpSpPr>
-          <a:xfrm>
-            <a:off x="-300936" y="57645"/>
-            <a:ext cx="2278271" cy="384029"/>
-            <a:chOff x="2740000" y="2928677"/>
-            <a:chExt cx="1851094" cy="312023"/>
-          </a:xfrm>
-        </p:grpSpPr>
-        <p:sp>
-          <p:nvSpPr>
-            <p:cNvPr id="9" name="文本框 8"/>
-            <p:cNvSpPr txBox="1"/>
-            <p:nvPr/>
-          </p:nvSpPr>
-          <p:spPr>
-            <a:xfrm>
-              <a:off x="2740000" y="2928677"/>
-              <a:ext cx="1851094" cy="212557"/>
-            </a:xfrm>
-            <a:prstGeom prst="rect">
-              <a:avLst/>
-            </a:prstGeom>
-            <a:noFill/>
-          </p:spPr>
-          <p:txBody>
-            <a:bodyPr wrap="square">
-              <a:spAutoFit/>
-            </a:bodyPr>
-            <a:lstStyle>
-              <a:defPPr>
-                <a:defRPr lang="en-US"/>
-              </a:defPPr>
-              <a:lvl1pPr>
-                <a:defRPr kumimoji="1" b="1">
-                  <a:solidFill>
-                    <a:schemeClr val="tx1">
-                      <a:lumMod val="85000"/>
-                      <a:lumOff val="15000"/>
-                    </a:schemeClr>
-                  </a:solidFill>
-                  <a:latin typeface="微软雅黑" panose="020B0503020204020204" pitchFamily="34" charset="-122"/>
-                  <a:ea typeface="微软雅黑" panose="020B0503020204020204" pitchFamily="34" charset="-122"/>
-                </a:defRPr>
-              </a:lvl1pPr>
-            </a:lstStyle>
-            <a:p>
-              <a:pPr algn="ctr"/>
-              <a:r>
-                <a:rPr lang="zh-CN" altLang="en-US" sz="1100" dirty="0">
-                  <a:solidFill>
-                    <a:schemeClr val="tx1">
-                      <a:lumMod val="75000"/>
-                      <a:lumOff val="25000"/>
-                    </a:schemeClr>
-                  </a:solidFill>
-                </a:rPr>
-                <a:t>真佳咨询 </a:t>
-              </a:r>
-              <a:endParaRPr lang="zh-CN" altLang="en-US" sz="1100" dirty="0">
-                <a:solidFill>
-                  <a:schemeClr val="tx1">
-                    <a:lumMod val="75000"/>
-                    <a:lumOff val="25000"/>
-                  </a:schemeClr>
-                </a:solidFill>
-              </a:endParaRPr>
-            </a:p>
-          </p:txBody>
-        </p:sp>
-        <p:pic>
-          <p:nvPicPr>
-            <p:cNvPr id="10" name="图片 9" descr="IMG_2662"/>
-            <p:cNvPicPr>
-              <a:picLocks noChangeAspect="1" noChangeArrowheads="1"/>
-            </p:cNvPicPr>
-            <p:nvPr/>
-          </p:nvPicPr>
-          <p:blipFill rotWithShape="1">
-            <a:blip r:embed="rId2">
-              <a:extLst>
-                <a:ext uri="{28A0092B-C50C-407E-A947-70E740481C1C}">
-                  <a14:useLocalDpi xmlns:a14="http://schemas.microsoft.com/office/drawing/2010/main" val="0"/>
-                </a:ext>
-              </a:extLst>
-            </a:blip>
-            <a:srcRect l="25801" t="16200" r="31934" b="41629"/>
-            <a:stretch>
-              <a:fillRect/>
-            </a:stretch>
-          </p:blipFill>
-          <p:spPr bwMode="auto">
-            <a:xfrm>
-              <a:off x="3003692" y="2935612"/>
-              <a:ext cx="487275" cy="273532"/>
-            </a:xfrm>
-            <a:prstGeom prst="rect">
-              <a:avLst/>
-            </a:prstGeom>
-            <a:noFill/>
-            <a:ln>
-              <a:noFill/>
-            </a:ln>
-            <a:extLst>
-              <a:ext uri="{909E8E84-426E-40DD-AFC4-6F175D3DCCD1}">
-                <a14:hiddenFill xmlns:a14="http://schemas.microsoft.com/office/drawing/2010/main">
-                  <a:solidFill>
-                    <a:srgbClr val="FFFFFF"/>
-                  </a:solidFill>
-                </a14:hiddenFill>
-              </a:ext>
-              <a:ext uri="{91240B29-F687-4F45-9708-019B960494DF}">
-                <a14:hiddenLine xmlns:a14="http://schemas.microsoft.com/office/drawing/2010/main" w="9525">
-                  <a:solidFill>
-                    <a:srgbClr val="000000"/>
-                  </a:solidFill>
-                  <a:miter lim="800000"/>
-                  <a:headEnd/>
-                  <a:tailEnd/>
-                </a14:hiddenLine>
-              </a:ext>
-            </a:extLst>
-          </p:spPr>
-        </p:pic>
-        <p:sp>
-          <p:nvSpPr>
-            <p:cNvPr id="11" name="文本框 10"/>
-            <p:cNvSpPr txBox="1"/>
-            <p:nvPr/>
-          </p:nvSpPr>
-          <p:spPr>
-            <a:xfrm>
-              <a:off x="3365896" y="3053149"/>
-              <a:ext cx="604387" cy="187551"/>
-            </a:xfrm>
-            <a:prstGeom prst="rect">
-              <a:avLst/>
-            </a:prstGeom>
-            <a:noFill/>
-          </p:spPr>
-          <p:txBody>
-            <a:bodyPr wrap="square">
-              <a:spAutoFit/>
-            </a:bodyPr>
-            <a:lstStyle>
-              <a:defPPr>
-                <a:defRPr lang="en-US"/>
-              </a:defPPr>
-              <a:lvl1pPr>
-                <a:defRPr sz="900">
-                  <a:solidFill>
-                    <a:schemeClr val="tx1">
-                      <a:lumMod val="50000"/>
-                      <a:lumOff val="50000"/>
-                    </a:schemeClr>
-                  </a:solidFill>
-                </a:defRPr>
-              </a:lvl1pPr>
-            </a:lstStyle>
-            <a:p>
-              <a:pPr algn="dist"/>
-              <a:r>
-                <a:rPr lang="en-US" altLang="zh-CN" dirty="0">
-                  <a:solidFill>
-                    <a:schemeClr val="tx1">
-                      <a:lumMod val="75000"/>
-                      <a:lumOff val="25000"/>
-                    </a:schemeClr>
-                  </a:solidFill>
-                </a:rPr>
-                <a:t>ZEN</a:t>
-              </a:r>
-              <a:r>
-                <a:rPr lang="zh-CN" altLang="en-US" dirty="0">
-                  <a:solidFill>
-                    <a:schemeClr val="tx1">
-                      <a:lumMod val="75000"/>
-                      <a:lumOff val="25000"/>
-                    </a:schemeClr>
-                  </a:solidFill>
-                </a:rPr>
-                <a:t> </a:t>
-              </a:r>
-              <a:r>
-                <a:rPr lang="en-US" altLang="zh-CN" dirty="0">
-                  <a:solidFill>
-                    <a:schemeClr val="tx1">
-                      <a:lumMod val="75000"/>
-                      <a:lumOff val="25000"/>
-                    </a:schemeClr>
-                  </a:solidFill>
-                </a:rPr>
-                <a:t>LEAN</a:t>
-              </a:r>
-              <a:endParaRPr lang="zh-CN" altLang="en-US" dirty="0">
-                <a:solidFill>
-                  <a:schemeClr val="tx1">
-                    <a:lumMod val="75000"/>
-                    <a:lumOff val="25000"/>
-                  </a:schemeClr>
-                </a:solidFill>
-              </a:endParaRPr>
-            </a:p>
-          </p:txBody>
-        </p:sp>
-      </p:grpSp>
       <p:sp>
         <p:nvSpPr>
           <p:cNvPr id="28" name="文本框 27"/>
@@ -4694,15 +4441,6 @@
               </a:rPr>
               <a:t>名称</a:t>
             </a:r>
-            <a:endParaRPr kumimoji="1" lang="zh-CN" altLang="en-GB" sz="600" i="0" dirty="0">
-              <a:solidFill>
-                <a:schemeClr val="bg1">
-                  <a:lumMod val="75000"/>
-                </a:schemeClr>
-              </a:solidFill>
-              <a:latin typeface="Microsoft YaHei Light" panose="020B0503020204020204" pitchFamily="34" charset="-122"/>
-              <a:ea typeface="Microsoft YaHei Light" panose="020B0503020204020204" pitchFamily="34" charset="-122"/>
-            </a:endParaRPr>
           </a:p>
         </p:txBody>
       </p:sp>
@@ -4763,19 +4501,7 @@
                 <a:latin typeface="Microsoft YaHei Light" panose="020B0503020204020204" pitchFamily="34" charset="-122"/>
                 <a:ea typeface="Microsoft YaHei Light" panose="020B0503020204020204" pitchFamily="34" charset="-122"/>
               </a:rPr>
-              <a:t>章节</a:t>
-            </a:r>
-            <a:r>
-              <a:rPr kumimoji="1" lang="zh-CN" altLang="en-GB" sz="600" b="0" i="0" dirty="0">
-                <a:solidFill>
-                  <a:schemeClr val="bg1">
-                    <a:lumMod val="75000"/>
-                  </a:schemeClr>
-                </a:solidFill>
-                <a:latin typeface="Microsoft YaHei Light" panose="020B0503020204020204" pitchFamily="34" charset="-122"/>
-                <a:ea typeface="Microsoft YaHei Light" panose="020B0503020204020204" pitchFamily="34" charset="-122"/>
-              </a:rPr>
-              <a:t>英文名称</a:t>
+              <a:t>章节英文名称</a:t>
             </a:r>
             <a:endParaRPr kumimoji="1" lang="zh-CN" altLang="en-US" sz="600" b="0" i="0" dirty="0">
               <a:solidFill>
@@ -5021,17 +4747,6 @@
                 </a:rPr>
                 <a:t>最佳实践</a:t>
               </a:r>
-              <a:endParaRPr lang="zh-CN" altLang="en-US" sz="800" b="0" i="0" dirty="0">
-                <a:solidFill>
-                  <a:schemeClr val="tx1">
-                    <a:lumMod val="50000"/>
-                    <a:lumOff val="50000"/>
-                  </a:schemeClr>
-                </a:solidFill>
-                <a:latin typeface="Microsoft YaHei Light" panose="020B0503020204020204" pitchFamily="34" charset="-122"/>
-                <a:ea typeface="Microsoft YaHei Light" panose="020B0503020204020204" pitchFamily="34" charset="-122"/>
-                <a:cs typeface="阿里巴巴普惠体 H" panose="00020600040101010101" pitchFamily="18" charset="-122"/>
-              </a:endParaRPr>
             </a:p>
           </p:txBody>
         </p:sp>
@@ -5201,7 +4916,6 @@
                 <a:rPr lang="en-US" altLang="zh-CN" dirty="0"/>
                 <a:t>Best Practices for Authentic Materials</a:t>
               </a:r>
-              <a:endParaRPr lang="en-US" altLang="zh-CN" dirty="0"/>
             </a:p>
           </p:txBody>
         </p:sp>
@@ -5248,7 +4962,6 @@
                 <a:rPr lang="zh-CN" altLang="en-US" dirty="0"/>
                 <a:t>Guangdong Zhenjia Enterprise Management Consulting Co., Ltd.</a:t>
               </a:r>
-              <a:endParaRPr lang="zh-CN" altLang="en-US" dirty="0"/>
             </a:p>
           </p:txBody>
         </p:sp>
@@ -5418,19 +5131,212 @@
               </a:rPr>
               <a:t>  </a:t>
             </a:r>
-            <a:endParaRPr kumimoji="1" lang="en-US" altLang="zh-CN" sz="1200" dirty="0">
-              <a:solidFill>
-                <a:schemeClr val="bg1">
-                  <a:lumMod val="75000"/>
-                </a:schemeClr>
-              </a:solidFill>
-              <a:latin typeface="Microsoft YaHei Light" panose="020B0503020204020204" pitchFamily="34" charset="-122"/>
-              <a:ea typeface="Microsoft YaHei Light" panose="020B0503020204020204" pitchFamily="34" charset="-122"/>
-              <a:sym typeface="+mn-ea"/>
-            </a:endParaRPr>
-          </a:p>
-        </p:txBody>
-      </p:sp>
+          </a:p>
+        </p:txBody>
+      </p:sp>
+      <p:grpSp>
+        <p:nvGrpSpPr>
+          <p:cNvPr id="13" name="组合 12"/>
+          <p:cNvGrpSpPr/>
+          <p:nvPr userDrawn="1"/>
+        </p:nvGrpSpPr>
+        <p:grpSpPr>
+          <a:xfrm>
+            <a:off x="-300990" y="57785"/>
+            <a:ext cx="2278380" cy="384175"/>
+            <a:chOff x="-474" y="91"/>
+            <a:chExt cx="3588" cy="605"/>
+          </a:xfrm>
+        </p:grpSpPr>
+        <p:sp>
+          <p:nvSpPr>
+            <p:cNvPr id="20" name="文本框 19"/>
+            <p:cNvSpPr txBox="1"/>
+            <p:nvPr userDrawn="1"/>
+          </p:nvSpPr>
+          <p:spPr>
+            <a:xfrm>
+              <a:off x="-474" y="91"/>
+              <a:ext cx="3588" cy="412"/>
+            </a:xfrm>
+            <a:prstGeom prst="rect">
+              <a:avLst/>
+            </a:prstGeom>
+            <a:noFill/>
+          </p:spPr>
+          <p:txBody>
+            <a:bodyPr wrap="square">
+              <a:spAutoFit/>
+            </a:bodyPr>
+            <a:lstStyle>
+              <a:defPPr>
+                <a:defRPr lang="en-US"/>
+              </a:defPPr>
+              <a:lvl1pPr>
+                <a:defRPr kumimoji="1" b="1">
+                  <a:solidFill>
+                    <a:schemeClr val="tx1">
+                      <a:lumMod val="85000"/>
+                      <a:lumOff val="15000"/>
+                    </a:schemeClr>
+                  </a:solidFill>
+                  <a:latin typeface="微软雅黑" panose="020B0503020204020204" pitchFamily="34" charset="-122"/>
+                  <a:ea typeface="微软雅黑" panose="020B0503020204020204" pitchFamily="34" charset="-122"/>
+                </a:defRPr>
+              </a:lvl1pPr>
+            </a:lstStyle>
+            <a:p>
+              <a:pPr algn="ctr"/>
+              <a:r>
+                <a:rPr lang="zh-CN" altLang="en-US" sz="1100" dirty="0">
+                  <a:solidFill>
+                    <a:schemeClr val="tx1">
+                      <a:lumMod val="75000"/>
+                      <a:lumOff val="25000"/>
+                    </a:schemeClr>
+                  </a:solidFill>
+                </a:rPr>
+                <a:t>真佳咨询 </a:t>
+              </a:r>
+            </a:p>
+          </p:txBody>
+        </p:sp>
+        <p:pic>
+          <p:nvPicPr>
+            <p:cNvPr id="2" name="图片 1" descr="IMG_2662"/>
+            <p:cNvPicPr>
+              <a:picLocks noChangeAspect="1" noChangeArrowheads="1"/>
+            </p:cNvPicPr>
+            <p:nvPr userDrawn="1"/>
+          </p:nvPicPr>
+          <p:blipFill rotWithShape="1">
+            <a:blip r:embed="rId3">
+              <a:extLst>
+                <a:ext uri="{28A0092B-C50C-407E-A947-70E740481C1C}">
+                  <a14:useLocalDpi xmlns:a14="http://schemas.microsoft.com/office/drawing/2010/main" val="0"/>
+                </a:ext>
+              </a:extLst>
+            </a:blip>
+            <a:srcRect l="25801" t="16200" r="31934" b="41629"/>
+            <a:stretch>
+              <a:fillRect/>
+            </a:stretch>
+          </p:blipFill>
+          <p:spPr bwMode="auto">
+            <a:xfrm>
+              <a:off x="37" y="104"/>
+              <a:ext cx="944" cy="530"/>
+            </a:xfrm>
+            <a:prstGeom prst="rect">
+              <a:avLst/>
+            </a:prstGeom>
+            <a:noFill/>
+            <a:ln>
+              <a:noFill/>
+            </a:ln>
+            <a:extLst>
+              <a:ext uri="{909E8E84-426E-40DD-AFC4-6F175D3DCCD1}">
+                <a14:hiddenFill xmlns:a14="http://schemas.microsoft.com/office/drawing/2010/main">
+                  <a:solidFill>
+                    <a:srgbClr val="FFFFFF"/>
+                  </a:solidFill>
+                </a14:hiddenFill>
+              </a:ext>
+              <a:ext uri="{91240B29-F687-4F45-9708-019B960494DF}">
+                <a14:hiddenLine xmlns:a14="http://schemas.microsoft.com/office/drawing/2010/main" w="9525">
+                  <a:solidFill>
+                    <a:srgbClr val="000000"/>
+                  </a:solidFill>
+                  <a:miter lim="800000"/>
+                  <a:headEnd/>
+                  <a:tailEnd/>
+                </a14:hiddenLine>
+              </a:ext>
+            </a:extLst>
+          </p:spPr>
+        </p:pic>
+        <p:sp>
+          <p:nvSpPr>
+            <p:cNvPr id="22" name="文本框 21"/>
+            <p:cNvSpPr txBox="1"/>
+            <p:nvPr userDrawn="1"/>
+          </p:nvSpPr>
+          <p:spPr>
+            <a:xfrm>
+              <a:off x="739" y="332"/>
+              <a:ext cx="1171" cy="364"/>
+            </a:xfrm>
+            <a:prstGeom prst="rect">
+              <a:avLst/>
+            </a:prstGeom>
+            <a:noFill/>
+          </p:spPr>
+          <p:txBody>
+            <a:bodyPr wrap="square">
+              <a:spAutoFit/>
+            </a:bodyPr>
+            <a:lstStyle>
+              <a:defPPr>
+                <a:defRPr lang="en-US"/>
+              </a:defPPr>
+              <a:lvl1pPr>
+                <a:defRPr sz="900">
+                  <a:solidFill>
+                    <a:schemeClr val="tx1">
+                      <a:lumMod val="50000"/>
+                      <a:lumOff val="50000"/>
+                    </a:schemeClr>
+                  </a:solidFill>
+                </a:defRPr>
+              </a:lvl1pPr>
+            </a:lstStyle>
+            <a:p>
+              <a:pPr algn="dist"/>
+              <a:r>
+                <a:rPr lang="en-US" altLang="zh-CN" dirty="0">
+                  <a:solidFill>
+                    <a:schemeClr val="tx1">
+                      <a:lumMod val="75000"/>
+                      <a:lumOff val="25000"/>
+                    </a:schemeClr>
+                  </a:solidFill>
+                </a:rPr>
+                <a:t>ZEN</a:t>
+              </a:r>
+              <a:r>
+                <a:rPr lang="zh-CN" altLang="en-US" dirty="0">
+                  <a:solidFill>
+                    <a:schemeClr val="tx1">
+                      <a:lumMod val="75000"/>
+                      <a:lumOff val="25000"/>
+                    </a:schemeClr>
+                  </a:solidFill>
+                </a:rPr>
+                <a:t> </a:t>
+              </a:r>
+              <a:r>
+                <a:rPr lang="en-US" altLang="zh-CN" dirty="0">
+                  <a:solidFill>
+                    <a:schemeClr val="tx1">
+                      <a:lumMod val="75000"/>
+                      <a:lumOff val="25000"/>
+                    </a:schemeClr>
+                  </a:solidFill>
+                </a:rPr>
+                <a:t>LEAN</a:t>
+              </a:r>
+              <a:endParaRPr lang="zh-CN" altLang="en-US" dirty="0">
+                <a:solidFill>
+                  <a:schemeClr val="tx1">
+                    <a:lumMod val="75000"/>
+                    <a:lumOff val="25000"/>
+                  </a:schemeClr>
+                </a:solidFill>
+              </a:endParaRPr>
+            </a:p>
+          </p:txBody>
+        </p:sp>
+      </p:grpSp>
     </p:spTree>
   </p:cSld>
   <p:clrMap bg1="lt1" tx1="dk1" bg2="lt2" tx2="dk2" accent1="accent1" accent2="accent2" accent3="accent3" accent4="accent4" accent5="accent5" accent6="accent6" hlink="hlink" folHlink="folHlink"/>
@@ -5798,15 +5704,6 @@
               </a:rPr>
               <a:t>课程名称英文</a:t>
             </a:r>
-            <a:endParaRPr kumimoji="1" lang="zh-CN" altLang="en-US" sz="1600" dirty="0">
-              <a:solidFill>
-                <a:schemeClr val="bg1">
-                  <a:lumMod val="65000"/>
-                </a:schemeClr>
-              </a:solidFill>
-              <a:latin typeface="Microsoft YaHei Light" panose="020B0503020204020204" pitchFamily="34" charset="-122"/>
-              <a:ea typeface="Microsoft YaHei Light" panose="020B0503020204020204" pitchFamily="34" charset="-122"/>
-            </a:endParaRPr>
           </a:p>
         </p:txBody>
       </p:sp>
@@ -5905,11 +5802,11 @@
           <p:nvPr/>
         </p:nvPicPr>
         <p:blipFill>
-          <a:blip r:embed="rId1">
+          <a:blip r:embed="rId4">
             <a:extLst>
               <a:ext uri="{BEBA8EAE-BF5A-486C-A8C5-ECC9F3942E4B}">
                 <a14:imgProps xmlns:a14="http://schemas.microsoft.com/office/drawing/2010/main">
-                  <a14:imgLayer r:embed="rId2">
+                  <a14:imgLayer r:embed="rId5">
                     <a14:imgEffect>
                       <a14:saturation sat="200000"/>
                     </a14:imgEffect>
@@ -6002,7 +5899,7 @@
           <p:nvPr/>
         </p:nvPicPr>
         <p:blipFill>
-          <a:blip r:embed="rId3">
+          <a:blip r:embed="rId6">
             <a:extLst>
               <a:ext uri="{28A0092B-C50C-407E-A947-70E740481C1C}">
                 <a14:useLocalDpi xmlns:a14="http://schemas.microsoft.com/office/drawing/2010/main" val="0"/>
@@ -6128,7 +6025,7 @@
           <p:cNvSpPr/>
           <p:nvPr>
             <p:custDataLst>
-              <p:tags r:id="rId4"/>
+              <p:tags r:id="rId1"/>
             </p:custDataLst>
           </p:nvPr>
         </p:nvSpPr>
@@ -6184,7 +6081,7 @@
           <p:cNvSpPr txBox="1"/>
           <p:nvPr>
             <p:custDataLst>
-              <p:tags r:id="rId5"/>
+              <p:tags r:id="rId2"/>
             </p:custDataLst>
           </p:nvPr>
         </p:nvSpPr>
@@ -6270,13 +6167,6 @@
               </a:rPr>
               <a:t>&amp;CEO</a:t>
             </a:r>
-            <a:endParaRPr lang="en-US" altLang="zh-CN" sz="1100" kern="0" dirty="0">
-              <a:solidFill>
-                <a:schemeClr val="bg1"/>
-              </a:solidFill>
-              <a:latin typeface="Microsoft YaHei Light" panose="020B0503020204020204" pitchFamily="34" charset="-122"/>
-              <a:ea typeface="Microsoft YaHei Light" panose="020B0503020204020204" pitchFamily="34" charset="-122"/>
-            </a:endParaRPr>
           </a:p>
         </p:txBody>
       </p:sp>
@@ -6548,31 +6438,8 @@
                 <a:latin typeface="Microsoft YaHei Light" panose="020B0503020204020204" pitchFamily="34" charset="-122"/>
                 <a:ea typeface="Microsoft YaHei Light" panose="020B0503020204020204" pitchFamily="34" charset="-122"/>
               </a:rPr>
-              <a:t>章节英文</a:t>
-            </a:r>
-            <a:r>
-              <a:rPr kumimoji="1" lang="zh-CN" altLang="en-US" sz="800" b="0" i="0" dirty="0">
-                <a:solidFill>
-                  <a:schemeClr val="tx1">
-                    <a:lumMod val="75000"/>
-                    <a:lumOff val="25000"/>
-                  </a:schemeClr>
-                </a:solidFill>
-                <a:latin typeface="Microsoft YaHei Light" panose="020B0503020204020204" pitchFamily="34" charset="-122"/>
-                <a:ea typeface="Microsoft YaHei Light" panose="020B0503020204020204" pitchFamily="34" charset="-122"/>
-              </a:rPr>
-              <a:t>名</a:t>
-            </a:r>
-            <a:endParaRPr kumimoji="1" lang="zh-CN" altLang="en-US" sz="800" b="0" i="0" dirty="0">
-              <a:solidFill>
-                <a:schemeClr val="tx1">
-                  <a:lumMod val="75000"/>
-                  <a:lumOff val="25000"/>
-                </a:schemeClr>
-              </a:solidFill>
-              <a:latin typeface="Microsoft YaHei Light" panose="020B0503020204020204" pitchFamily="34" charset="-122"/>
-              <a:ea typeface="Microsoft YaHei Light" panose="020B0503020204020204" pitchFamily="34" charset="-122"/>
-            </a:endParaRPr>
+              <a:t>章节英文名</a:t>
+            </a:r>
           </a:p>
         </p:txBody>
       </p:sp>
@@ -6628,11 +6495,11 @@
   <p:clrMapOvr>
     <a:masterClrMapping/>
   </p:clrMapOvr>
-  <mc:AlternateContent xmlns:mc="http://schemas.openxmlformats.org/markup-compatibility/2006">
-    <mc:Choice xmlns:p14="http://schemas.microsoft.com/office/powerpoint/2010/main" Requires="p14">
+  <mc:AlternateContent xmlns:mc="http://schemas.openxmlformats.org/markup-compatibility/2006" xmlns:p14="http://schemas.microsoft.com/office/powerpoint/2010/main">
+    <mc:Choice Requires="p14">
       <p:transition p14:dur="10"/>
     </mc:Choice>
-    <mc:Fallback>
+    <mc:Fallback xmlns="">
       <p:transition/>
     </mc:Fallback>
   </mc:AlternateContent>
@@ -6716,31 +6583,8 @@
                 <a:latin typeface="Microsoft YaHei Light" panose="020B0503020204020204" pitchFamily="34" charset="-122"/>
                 <a:ea typeface="Microsoft YaHei Light" panose="020B0503020204020204" pitchFamily="34" charset="-122"/>
               </a:rPr>
-              <a:t>章节英文</a:t>
-            </a:r>
-            <a:r>
-              <a:rPr kumimoji="1" lang="zh-CN" altLang="en-US" sz="2800" b="0" i="0" dirty="0">
-                <a:solidFill>
-                  <a:schemeClr val="tx1">
-                    <a:lumMod val="75000"/>
-                    <a:lumOff val="25000"/>
-                  </a:schemeClr>
-                </a:solidFill>
-                <a:latin typeface="Microsoft YaHei Light" panose="020B0503020204020204" pitchFamily="34" charset="-122"/>
-                <a:ea typeface="Microsoft YaHei Light" panose="020B0503020204020204" pitchFamily="34" charset="-122"/>
-              </a:rPr>
-              <a:t>名称</a:t>
-            </a:r>
-            <a:endParaRPr kumimoji="1" lang="zh-CN" altLang="en-US" sz="2800" b="0" i="0" dirty="0">
-              <a:solidFill>
-                <a:schemeClr val="tx1">
-                  <a:lumMod val="75000"/>
-                  <a:lumOff val="25000"/>
-                </a:schemeClr>
-              </a:solidFill>
-              <a:latin typeface="Microsoft YaHei Light" panose="020B0503020204020204" pitchFamily="34" charset="-122"/>
-              <a:ea typeface="Microsoft YaHei Light" panose="020B0503020204020204" pitchFamily="34" charset="-122"/>
-            </a:endParaRPr>
+              <a:t>章节英文名称</a:t>
+            </a:r>
           </a:p>
         </p:txBody>
       </p:sp>
@@ -6749,11 +6593,11 @@
   <p:clrMapOvr>
     <a:masterClrMapping/>
   </p:clrMapOvr>
-  <mc:AlternateContent xmlns:mc="http://schemas.openxmlformats.org/markup-compatibility/2006">
-    <mc:Choice xmlns:p14="http://schemas.microsoft.com/office/powerpoint/2010/main" Requires="p14">
+  <mc:AlternateContent xmlns:mc="http://schemas.openxmlformats.org/markup-compatibility/2006" xmlns:p14="http://schemas.microsoft.com/office/powerpoint/2010/main">
+    <mc:Choice Requires="p14">
       <p:transition p14:dur="10"/>
     </mc:Choice>
-    <mc:Fallback>
+    <mc:Fallback xmlns="">
       <p:transition/>
     </mc:Fallback>
   </mc:AlternateContent>
@@ -6769,7 +6613,14 @@
         <p:cNvGrpSpPr/>
         <p:nvPr/>
       </p:nvGrpSpPr>
-      <p:grpSpPr/>
+      <p:grpSpPr>
+        <a:xfrm>
+          <a:off x="0" y="0"/>
+          <a:ext cx="0" cy="0"/>
+          <a:chOff x="0" y="0"/>
+          <a:chExt cx="0" cy="0"/>
+        </a:xfrm>
+      </p:grpSpPr>
       <p:sp>
         <p:nvSpPr>
           <p:cNvPr id="4" name="文本框 3"/>
@@ -6790,6 +6641,7 @@
           <a:bodyPr wrap="square" rtlCol="0" anchor="t">
             <a:spAutoFit/>
           </a:bodyPr>
+          <a:lstStyle/>
           <a:p>
             <a:r>
               <a:rPr kumimoji="1" lang="zh-CN" altLang="en-US" b="1" dirty="0">
@@ -7002,15 +6854,6 @@
               </a:rPr>
               <a:t>Any limitation starts from your own heart</a:t>
             </a:r>
-            <a:endParaRPr lang="en-US" altLang="zh-CN" sz="800" dirty="0">
-              <a:solidFill>
-                <a:schemeClr val="bg1">
-                  <a:lumMod val="75000"/>
-                </a:schemeClr>
-              </a:solidFill>
-              <a:latin typeface="Microsoft YaHei Light" panose="020B0503020204020204" pitchFamily="34" charset="-122"/>
-              <a:ea typeface="Microsoft YaHei Light" panose="020B0503020204020204" pitchFamily="34" charset="-122"/>
-            </a:endParaRPr>
           </a:p>
           <a:p>
             <a:r>
@@ -7025,15 +6868,6 @@
               </a:rPr>
               <a:t>All major breakthroughs come from breaking old ways of thinking</a:t>
             </a:r>
-            <a:endParaRPr lang="en-US" altLang="zh-CN" sz="800" dirty="0">
-              <a:solidFill>
-                <a:schemeClr val="bg1">
-                  <a:lumMod val="75000"/>
-                </a:schemeClr>
-              </a:solidFill>
-              <a:latin typeface="Microsoft YaHei Light" panose="020B0503020204020204" pitchFamily="34" charset="-122"/>
-              <a:ea typeface="Microsoft YaHei Light" panose="020B0503020204020204" pitchFamily="34" charset="-122"/>
-            </a:endParaRPr>
           </a:p>
         </p:txBody>
       </p:sp>
@@ -7136,14 +6970,6 @@
                 </a:rPr>
                 <a:t> </a:t>
               </a:r>
-              <a:endParaRPr lang="zh-CN" altLang="en-US" sz="1000" dirty="0">
-                <a:solidFill>
-                  <a:schemeClr val="tx1">
-                    <a:lumMod val="75000"/>
-                    <a:lumOff val="25000"/>
-                  </a:schemeClr>
-                </a:solidFill>
-              </a:endParaRPr>
             </a:p>
           </p:txBody>
         </p:sp>
@@ -7156,7 +6982,7 @@
             <p:nvPr/>
           </p:nvPicPr>
           <p:blipFill rotWithShape="1">
-            <a:blip r:embed="rId1">
+            <a:blip r:embed="rId3">
               <a:extLst>
                 <a:ext uri="{28A0092B-C50C-407E-A947-70E740481C1C}">
                   <a14:useLocalDpi xmlns:a14="http://schemas.microsoft.com/office/drawing/2010/main" val="0"/>
@@ -7248,13 +7074,13 @@
 </file>
 
 <file path=ppt/tags/tag1.xml><?xml version="1.0" encoding="utf-8"?>
-<p:tagLst xmlns:p="http://schemas.openxmlformats.org/presentationml/2006/main">
+<p:tagLst xmlns:a="http://schemas.openxmlformats.org/drawingml/2006/main" xmlns:r="http://schemas.openxmlformats.org/officeDocument/2006/relationships" xmlns:p="http://schemas.openxmlformats.org/presentationml/2006/main">
   <p:tag name="KSO_WM_BEAUTIFY_FLAG" val=""/>
 </p:tagLst>
 </file>
 
 <file path=ppt/tags/tag2.xml><?xml version="1.0" encoding="utf-8"?>
-<p:tagLst xmlns:p="http://schemas.openxmlformats.org/presentationml/2006/main">
+<p:tagLst xmlns:a="http://schemas.openxmlformats.org/drawingml/2006/main" xmlns:r="http://schemas.openxmlformats.org/officeDocument/2006/relationships" xmlns:p="http://schemas.openxmlformats.org/presentationml/2006/main">
   <p:tag name="KSO_WM_BEAUTIFY_FLAG" val=""/>
 </p:tagLst>
 </file>
@@ -7531,6 +7357,7 @@
       </a:style>
     </a:lnDef>
   </a:objectDefaults>
+  <a:extraClrSchemeLst/>
   <a:extLst>
     <a:ext uri="{05A4C25C-085E-4340-85A3-A5531E510DB2}">
       <thm15:themeFamily xmlns:thm15="http://schemas.microsoft.com/office/thememl/2012/main" name="Office Theme" id="{62F939B6-93AF-4DB8-9C6B-D6C7DFDC589F}" vid="{4A3C46E8-61CC-4603-A589-7422A47A8E4A}"/>
@@ -7811,6 +7638,7 @@
       </a:style>
     </a:lnDef>
   </a:objectDefaults>
+  <a:extraClrSchemeLst/>
   <a:extLst>
     <a:ext uri="{05A4C25C-085E-4340-85A3-A5531E510DB2}">
       <thm15:themeFamily xmlns:thm15="http://schemas.microsoft.com/office/thememl/2012/main" name="Office Theme" id="{62F939B6-93AF-4DB8-9C6B-D6C7DFDC589F}" vid="{4A3C46E8-61CC-4603-A589-7422A47A8E4A}"/>
@@ -8091,6 +7919,7 @@
       </a:style>
     </a:lnDef>
   </a:objectDefaults>
+  <a:extraClrSchemeLst/>
   <a:extLst>
     <a:ext uri="{05A4C25C-085E-4340-85A3-A5531E510DB2}">
       <thm15:themeFamily xmlns:thm15="http://schemas.microsoft.com/office/thememl/2012/main" name="Office Theme" id="{62F939B6-93AF-4DB8-9C6B-D6C7DFDC589F}" vid="{4A3C46E8-61CC-4603-A589-7422A47A8E4A}"/>
@@ -8371,6 +8200,7 @@
       </a:style>
     </a:lnDef>
   </a:objectDefaults>
+  <a:extraClrSchemeLst/>
   <a:extLst>
     <a:ext uri="{05A4C25C-085E-4340-85A3-A5531E510DB2}">
       <thm15:themeFamily xmlns:thm15="http://schemas.microsoft.com/office/thememl/2012/main" name="Office Theme" id="{62F939B6-93AF-4DB8-9C6B-D6C7DFDC589F}" vid="{4A3C46E8-61CC-4603-A589-7422A47A8E4A}"/>
